--- a/10_paper/talk/out/yolo_npu_cpu_offload_talk_v4.pptx
+++ b/10_paper/talk/out/yolo_npu_cpu_offload_talk_v4.pptx
@@ -11191,7 +11191,7 @@
                   <a:schemeClr val="tx1"/>
                 </a:solidFill>
               </a:rPr>
-              <a:t>4스레드로 나눠도 평면화(약 1.1 ms) 같은 메모리 단계는 줄지 않는다 — GPU는 이 단계가 없다</a:t>
+              <a:t>평면화(약 1.1 ms)는 넷으로 나누면 오히려 느려진다(1.17→1.60 ms) — GPU는 이 단계가 없다</a:t>
             </a:r>
             <a:endParaRPr lang="ko-KR" sz="1400" dirty="0"/>
           </a:p>
